--- a/vrednye-privychki.pptx
+++ b/vrednye-privychki.pptx
@@ -7856,7 +7856,7 @@
                 </a:solidFill>
                 <a:latin typeface="Arial"/>
               </a:rPr>
-              <a:t>Раздражительность и тяга сильнее всего в первую неделю и ослабевают за 2–4 недели</a:t>
+              <a:t>Раздражительность и желание закурить сильнее всего в первую неделю и ослабевают за 2–4 недели</a:t>
             </a:r>
           </a:p>
         </p:txBody>
